--- a/assets/figures-editable/c3-c4/c4-e39.pptx
+++ b/assets/figures-editable/c3-c4/c4-e39.pptx
@@ -3104,8 +3104,8 @@
         </p:nvSpPr>
         <p:spPr>
           <a:xfrm>
-            <a:off x="274320" y="137160"/>
-            <a:ext cx="11612880" cy="365760"/>
+            <a:off x="274320" y="118872"/>
+            <a:ext cx="11612880" cy="340105"/>
           </a:xfrm>
           <a:prstGeom prst="rect">
             <a:avLst/>
@@ -3114,7 +3114,7 @@
           <a:effectLst/>
         </p:spPr>
         <p:txBody>
-          <a:bodyPr wrap="square" lIns="27432" rIns="27432" tIns="18288" bIns="18288" anchor="ctr">
+          <a:bodyPr wrap="none" lIns="18288" rIns="18288" tIns="18288" bIns="18288" anchor="t">
             <a:spAutoFit/>
           </a:bodyPr>
           <a:lstStyle/>
@@ -3125,7 +3125,7 @@
               </a:spcAft>
             </a:pPr>
             <a:r>
-              <a:rPr sz="2100" b="0" i="0">
+              <a:rPr sz="1900" b="1" i="0">
                 <a:solidFill>
                   <a:srgbClr val="8EDBD4"/>
                 </a:solidFill>
@@ -3138,56 +3138,200 @@
       </p:sp>
       <p:sp>
         <p:nvSpPr>
-          <p:cNvPr id="3" name="C4-E39 rect 1" descr="sci-ppt:o001"/>
+          <p:cNvPr id="3" name="C4-E39 text 1" descr="sci-ppt:o001"/>
+          <p:cNvSpPr txBox="1"/>
+          <p:nvPr/>
+        </p:nvSpPr>
+        <p:spPr>
+          <a:xfrm>
+            <a:off x="457200" y="914400"/>
+            <a:ext cx="11247120" cy="254889"/>
+          </a:xfrm>
+          <a:prstGeom prst="rect">
+            <a:avLst/>
+          </a:prstGeom>
+          <a:noFill/>
+          <a:effectLst/>
+        </p:spPr>
+        <p:txBody>
+          <a:bodyPr wrap="none" lIns="18288" rIns="18288" tIns="18288" bIns="18288" anchor="t">
+            <a:spAutoFit/>
+          </a:bodyPr>
+          <a:lstStyle/>
+          <a:p>
+            <a:pPr algn="l">
+              <a:spcAft>
+                <a:spcPts val="0"/>
+              </a:spcAft>
+            </a:pPr>
+            <a:r>
+              <a:rPr sz="1350" b="1" i="0">
+                <a:solidFill>
+                  <a:srgbClr val="8EDBD4"/>
+                </a:solidFill>
+                <a:latin typeface="Arial"/>
+              </a:rPr>
+              <a:t>Defence 3: passing global budgets starts, rather than completes, the argument</a:t>
+            </a:r>
+          </a:p>
+        </p:txBody>
+      </p:sp>
+      <p:sp>
+        <p:nvSpPr>
+          <p:cNvPr id="4" name="C4-E39 round_rect 2" descr="sci-ppt:o002"/>
           <p:cNvSpPr/>
           <p:nvPr/>
         </p:nvSpPr>
         <p:spPr>
           <a:xfrm>
-            <a:off x="1097280" y="914400"/>
-            <a:ext cx="1828800" cy="228600"/>
-          </a:xfrm>
-          <a:prstGeom prst="rect">
+            <a:off x="457200" y="1371600"/>
+            <a:ext cx="3444240" cy="1371600"/>
+          </a:xfrm>
+          <a:prstGeom prst="roundRect">
             <a:avLst/>
           </a:prstGeom>
           <a:solidFill>
             <a:srgbClr val="213E4B"/>
           </a:solidFill>
-          <a:ln w="19050">
+          <a:ln w="20320">
+            <a:solidFill>
+              <a:srgbClr val="F2B880"/>
+            </a:solidFill>
+          </a:ln>
+          <a:effectLst/>
+        </p:spPr>
+        <p:txBody>
+          <a:bodyPr rtlCol="0" anchor="ctr"/>
+          <a:lstStyle/>
+          <a:p>
+            <a:pPr algn="ctr"/>
+          </a:p>
+        </p:txBody>
+      </p:sp>
+      <p:sp>
+        <p:nvSpPr>
+          <p:cNvPr id="5" name="C4-E39 text 3" descr="sci-ppt:o003"/>
+          <p:cNvSpPr txBox="1"/>
+          <p:nvPr/>
+        </p:nvSpPr>
+        <p:spPr>
+          <a:xfrm>
+            <a:off x="530352" y="1426464"/>
+            <a:ext cx="3297936" cy="254889"/>
+          </a:xfrm>
+          <a:prstGeom prst="rect">
+            <a:avLst/>
+          </a:prstGeom>
+          <a:noFill/>
+          <a:effectLst/>
+        </p:spPr>
+        <p:txBody>
+          <a:bodyPr wrap="none" lIns="18288" rIns="18288" tIns="18288" bIns="18288" anchor="t">
+            <a:spAutoFit/>
+          </a:bodyPr>
+          <a:lstStyle/>
+          <a:p>
+            <a:pPr algn="ctr">
+              <a:spcAft>
+                <a:spcPts val="0"/>
+              </a:spcAft>
+            </a:pPr>
+            <a:r>
+              <a:rPr sz="1350" b="1" i="0">
+                <a:solidFill>
+                  <a:srgbClr val="F2B880"/>
+                </a:solidFill>
+                <a:latin typeface="Arial"/>
+              </a:rPr>
+              <a:t>energy</a:t>
+            </a:r>
+          </a:p>
+        </p:txBody>
+      </p:sp>
+      <p:sp>
+        <p:nvSpPr>
+          <p:cNvPr id="6" name="C4-E39 text 4" descr="sci-ppt:o004"/>
+          <p:cNvSpPr txBox="1"/>
+          <p:nvPr/>
+        </p:nvSpPr>
+        <p:spPr>
+          <a:xfrm>
+            <a:off x="530352" y="1699641"/>
+            <a:ext cx="3297936" cy="239395"/>
+          </a:xfrm>
+          <a:prstGeom prst="rect">
+            <a:avLst/>
+          </a:prstGeom>
+          <a:noFill/>
+          <a:effectLst/>
+        </p:spPr>
+        <p:txBody>
+          <a:bodyPr wrap="none" lIns="18288" rIns="18288" tIns="18288" bIns="18288" anchor="t">
+            <a:spAutoFit/>
+          </a:bodyPr>
+          <a:lstStyle/>
+          <a:p>
+            <a:pPr algn="ctr">
+              <a:spcAft>
+                <a:spcPts val="0"/>
+              </a:spcAft>
+            </a:pPr>
+            <a:r>
+              <a:rPr sz="1250" b="0" i="0">
+                <a:solidFill>
+                  <a:srgbClr val="E7F0F3"/>
+                </a:solidFill>
+                <a:latin typeface="Arial"/>
+              </a:rPr>
+              <a:t>E_solid ≥ Γ A_f + ½ m_f v_f²</a:t>
+            </a:r>
+          </a:p>
+        </p:txBody>
+      </p:sp>
+      <p:cxnSp>
+        <p:nvCxnSpPr>
+          <p:cNvPr id="7" name="C4-E39 arrow 5" descr="sci-ppt:o005"/>
+          <p:cNvCxnSpPr/>
+          <p:nvPr/>
+        </p:nvCxnSpPr>
+        <p:spPr>
+          <a:xfrm>
+            <a:off x="3928872" y="2057400"/>
+            <a:ext cx="402336" cy="0"/>
+          </a:xfrm>
+          <a:prstGeom prst="line">
+            <a:avLst/>
+          </a:prstGeom>
+          <a:ln w="27940">
             <a:solidFill>
               <a:srgbClr val="B4C7D2"/>
             </a:solidFill>
+            <a:headEnd type="none" w="med" len="med"/>
+            <a:tailEnd type="triangle" w="med" len="med"/>
           </a:ln>
           <a:effectLst/>
         </p:spPr>
-        <p:txBody>
-          <a:bodyPr rtlCol="0" anchor="ctr"/>
-          <a:lstStyle/>
-          <a:p>
-            <a:pPr algn="ctr"/>
-          </a:p>
-        </p:txBody>
-      </p:sp>
-      <p:sp>
-        <p:nvSpPr>
-          <p:cNvPr id="4" name="C4-E39 rect 2" descr="sci-ppt:o002"/>
+      </p:cxnSp>
+      <p:sp>
+        <p:nvSpPr>
+          <p:cNvPr id="8" name="C4-E39 round_rect 6" descr="sci-ppt:o006"/>
           <p:cNvSpPr/>
           <p:nvPr/>
         </p:nvSpPr>
         <p:spPr>
           <a:xfrm>
-            <a:off x="914400" y="3383280"/>
-            <a:ext cx="10332720" cy="274320"/>
-          </a:xfrm>
-          <a:prstGeom prst="rect">
+            <a:off x="4358640" y="1371600"/>
+            <a:ext cx="3444240" cy="1371600"/>
+          </a:xfrm>
+          <a:prstGeom prst="roundRect">
             <a:avLst/>
           </a:prstGeom>
           <a:solidFill>
             <a:srgbClr val="213E4B"/>
           </a:solidFill>
-          <a:ln w="19050">
+          <a:ln w="20320">
             <a:solidFill>
-              <a:srgbClr val="B4C7D2"/>
+              <a:srgbClr val="F28BA0"/>
             </a:solidFill>
           </a:ln>
           <a:effectLst/>
@@ -3200,45 +3344,103 @@
           </a:p>
         </p:txBody>
       </p:sp>
+      <p:sp>
+        <p:nvSpPr>
+          <p:cNvPr id="9" name="C4-E39 text 7" descr="sci-ppt:o007"/>
+          <p:cNvSpPr txBox="1"/>
+          <p:nvPr/>
+        </p:nvSpPr>
+        <p:spPr>
+          <a:xfrm>
+            <a:off x="4431792" y="1426464"/>
+            <a:ext cx="3297936" cy="254889"/>
+          </a:xfrm>
+          <a:prstGeom prst="rect">
+            <a:avLst/>
+          </a:prstGeom>
+          <a:noFill/>
+          <a:effectLst/>
+        </p:spPr>
+        <p:txBody>
+          <a:bodyPr wrap="none" lIns="18288" rIns="18288" tIns="18288" bIns="18288" anchor="t">
+            <a:spAutoFit/>
+          </a:bodyPr>
+          <a:lstStyle/>
+          <a:p>
+            <a:pPr algn="ctr">
+              <a:spcAft>
+                <a:spcPts val="0"/>
+              </a:spcAft>
+            </a:pPr>
+            <a:r>
+              <a:rPr sz="1350" b="1" i="0">
+                <a:solidFill>
+                  <a:srgbClr val="F28BA0"/>
+                </a:solidFill>
+                <a:latin typeface="Arial"/>
+              </a:rPr>
+              <a:t>momentum</a:t>
+            </a:r>
+          </a:p>
+        </p:txBody>
+      </p:sp>
+      <p:sp>
+        <p:nvSpPr>
+          <p:cNvPr id="10" name="C4-E39 text 8" descr="sci-ppt:o008"/>
+          <p:cNvSpPr txBox="1"/>
+          <p:nvPr/>
+        </p:nvSpPr>
+        <p:spPr>
+          <a:xfrm>
+            <a:off x="4431792" y="1699641"/>
+            <a:ext cx="3297936" cy="239395"/>
+          </a:xfrm>
+          <a:prstGeom prst="rect">
+            <a:avLst/>
+          </a:prstGeom>
+          <a:noFill/>
+          <a:effectLst/>
+        </p:spPr>
+        <p:txBody>
+          <a:bodyPr wrap="none" lIns="18288" rIns="18288" tIns="18288" bIns="18288" anchor="t">
+            <a:spAutoFit/>
+          </a:bodyPr>
+          <a:lstStyle/>
+          <a:p>
+            <a:pPr algn="ctr">
+              <a:spcAft>
+                <a:spcPts val="0"/>
+              </a:spcAft>
+            </a:pPr>
+            <a:r>
+              <a:rPr sz="1250" b="0" i="0">
+                <a:solidFill>
+                  <a:srgbClr val="E7F0F3"/>
+                </a:solidFill>
+                <a:latin typeface="Arial"/>
+              </a:rPr>
+              <a:t>Iₙₑₜ ≥ m_f v_f</a:t>
+            </a:r>
+          </a:p>
+        </p:txBody>
+      </p:sp>
       <p:cxnSp>
         <p:nvCxnSpPr>
-          <p:cNvPr id="5" name="C4-E39 line 3" descr="sci-ppt:o003"/>
+          <p:cNvPr id="11" name="C4-E39 arrow 9" descr="sci-ppt:o009"/>
           <p:cNvCxnSpPr/>
           <p:nvPr/>
         </p:nvCxnSpPr>
         <p:spPr>
           <a:xfrm>
-            <a:off x="2011680" y="1234440"/>
-            <a:ext cx="0" cy="2103120"/>
+            <a:off x="7830312" y="2057400"/>
+            <a:ext cx="402336" cy="0"/>
           </a:xfrm>
           <a:prstGeom prst="line">
             <a:avLst/>
           </a:prstGeom>
-          <a:ln w="25400">
+          <a:ln w="27940">
             <a:solidFill>
               <a:srgbClr val="B4C7D2"/>
-            </a:solidFill>
-          </a:ln>
-          <a:effectLst/>
-        </p:spPr>
-      </p:cxnSp>
-      <p:cxnSp>
-        <p:nvCxnSpPr>
-          <p:cNvPr id="6" name="C4-E39 arrow 4" descr="sci-ppt:o004"/>
-          <p:cNvCxnSpPr/>
-          <p:nvPr/>
-        </p:nvCxnSpPr>
-        <p:spPr>
-          <a:xfrm>
-            <a:off x="2011680" y="1234440"/>
-            <a:ext cx="2560320" cy="2103120"/>
-          </a:xfrm>
-          <a:prstGeom prst="line">
-            <a:avLst/>
-          </a:prstGeom>
-          <a:ln w="25400">
-            <a:solidFill>
-              <a:srgbClr val="8EDBD4"/>
             </a:solidFill>
             <a:headEnd type="none" w="med" len="med"/>
             <a:tailEnd type="triangle" w="med" len="med"/>
@@ -3246,38 +3448,48 @@
           <a:effectLst/>
         </p:spPr>
       </p:cxnSp>
-      <p:cxnSp>
-        <p:nvCxnSpPr>
-          <p:cNvPr id="7" name="C4-E39 line 5" descr="sci-ppt:o005"/>
-          <p:cNvCxnSpPr/>
+      <p:sp>
+        <p:nvSpPr>
+          <p:cNvPr id="12" name="C4-E39 round_rect 10" descr="sci-ppt:o010"/>
+          <p:cNvSpPr/>
           <p:nvPr/>
-        </p:nvCxnSpPr>
-        <p:spPr>
-          <a:xfrm>
-            <a:off x="2011680" y="3017520"/>
-            <a:ext cx="2560320" cy="0"/>
-          </a:xfrm>
-          <a:prstGeom prst="line">
+        </p:nvSpPr>
+        <p:spPr>
+          <a:xfrm>
+            <a:off x="8260080" y="1371600"/>
+            <a:ext cx="3444240" cy="1371600"/>
+          </a:xfrm>
+          <a:prstGeom prst="roundRect">
             <a:avLst/>
           </a:prstGeom>
-          <a:ln w="25400">
+          <a:solidFill>
+            <a:srgbClr val="213E4B"/>
+          </a:solidFill>
+          <a:ln w="20320">
             <a:solidFill>
               <a:srgbClr val="8EDBD4"/>
             </a:solidFill>
           </a:ln>
           <a:effectLst/>
         </p:spPr>
-      </p:cxnSp>
-      <p:sp>
-        <p:nvSpPr>
-          <p:cNvPr id="8" name="C4-E39 text 6" descr="sci-ppt:o006"/>
+        <p:txBody>
+          <a:bodyPr rtlCol="0" anchor="ctr"/>
+          <a:lstStyle/>
+          <a:p>
+            <a:pPr algn="ctr"/>
+          </a:p>
+        </p:txBody>
+      </p:sp>
+      <p:sp>
+        <p:nvSpPr>
+          <p:cNvPr id="13" name="C4-E39 text 11" descr="sci-ppt:o011"/>
           <p:cNvSpPr txBox="1"/>
           <p:nvPr/>
         </p:nvSpPr>
         <p:spPr>
           <a:xfrm>
-            <a:off x="2880360" y="2697480"/>
-            <a:ext cx="1828800" cy="274320"/>
+            <a:off x="8333232" y="1426464"/>
+            <a:ext cx="3297936" cy="254889"/>
           </a:xfrm>
           <a:prstGeom prst="rect">
             <a:avLst/>
@@ -3286,7 +3498,119 @@
           <a:effectLst/>
         </p:spPr>
         <p:txBody>
-          <a:bodyPr wrap="square" lIns="27432" rIns="27432" tIns="18288" bIns="18288" anchor="ctr">
+          <a:bodyPr wrap="none" lIns="18288" rIns="18288" tIns="18288" bIns="18288" anchor="t">
+            <a:spAutoFit/>
+          </a:bodyPr>
+          <a:lstStyle/>
+          <a:p>
+            <a:pPr algn="ctr">
+              <a:spcAft>
+                <a:spcPts val="0"/>
+              </a:spcAft>
+            </a:pPr>
+            <a:r>
+              <a:rPr sz="1350" b="1" i="0">
+                <a:solidFill>
+                  <a:srgbClr val="8EDBD4"/>
+                </a:solidFill>
+                <a:latin typeface="Arial"/>
+              </a:rPr>
+              <a:t>placement</a:t>
+            </a:r>
+          </a:p>
+        </p:txBody>
+      </p:sp>
+      <p:sp>
+        <p:nvSpPr>
+          <p:cNvPr id="14" name="C4-E39 text 12" descr="sci-ppt:o012"/>
+          <p:cNvSpPr txBox="1"/>
+          <p:nvPr/>
+        </p:nvSpPr>
+        <p:spPr>
+          <a:xfrm>
+            <a:off x="8333232" y="1699641"/>
+            <a:ext cx="3297936" cy="239395"/>
+          </a:xfrm>
+          <a:prstGeom prst="rect">
+            <a:avLst/>
+          </a:prstGeom>
+          <a:noFill/>
+          <a:effectLst/>
+        </p:spPr>
+        <p:txBody>
+          <a:bodyPr wrap="none" lIns="18288" rIns="18288" tIns="18288" bIns="18288" anchor="t">
+            <a:spAutoFit/>
+          </a:bodyPr>
+          <a:lstStyle/>
+          <a:p>
+            <a:pPr algn="ctr">
+              <a:spcAft>
+                <a:spcPts val="0"/>
+              </a:spcAft>
+            </a:pPr>
+            <a:r>
+              <a:rPr sz="1250" b="0" i="0">
+                <a:solidFill>
+                  <a:srgbClr val="E7F0F3"/>
+                </a:solidFill>
+                <a:latin typeface="Arial"/>
+              </a:rPr>
+              <a:t>Δx = H_f tan θ</a:t>
+            </a:r>
+          </a:p>
+        </p:txBody>
+      </p:sp>
+      <p:sp>
+        <p:nvSpPr>
+          <p:cNvPr id="15" name="C4-E39 round_rect 13" descr="sci-ppt:o013"/>
+          <p:cNvSpPr/>
+          <p:nvPr/>
+        </p:nvSpPr>
+        <p:spPr>
+          <a:xfrm>
+            <a:off x="457200" y="3108960"/>
+            <a:ext cx="5486400" cy="2377440"/>
+          </a:xfrm>
+          <a:prstGeom prst="roundRect">
+            <a:avLst/>
+          </a:prstGeom>
+          <a:solidFill>
+            <a:srgbClr val="213E4B"/>
+          </a:solidFill>
+          <a:ln w="20320">
+            <a:solidFill>
+              <a:srgbClr val="8EDBD4"/>
+            </a:solidFill>
+          </a:ln>
+          <a:effectLst/>
+        </p:spPr>
+        <p:txBody>
+          <a:bodyPr rtlCol="0" anchor="ctr"/>
+          <a:lstStyle/>
+          <a:p>
+            <a:pPr algn="ctr"/>
+          </a:p>
+        </p:txBody>
+      </p:sp>
+      <p:sp>
+        <p:nvSpPr>
+          <p:cNvPr id="16" name="C4-E39 text 14" descr="sci-ppt:o014"/>
+          <p:cNvSpPr txBox="1"/>
+          <p:nvPr/>
+        </p:nvSpPr>
+        <p:spPr>
+          <a:xfrm>
+            <a:off x="566928" y="3163824"/>
+            <a:ext cx="5266944" cy="247142"/>
+          </a:xfrm>
+          <a:prstGeom prst="rect">
+            <a:avLst/>
+          </a:prstGeom>
+          <a:noFill/>
+          <a:effectLst/>
+        </p:spPr>
+        <p:txBody>
+          <a:bodyPr wrap="none" lIns="18288" rIns="18288" tIns="18288" bIns="18288" anchor="t">
             <a:spAutoFit/>
           </a:bodyPr>
           <a:lstStyle/>
@@ -3297,27 +3621,99 @@
               </a:spcAft>
             </a:pPr>
             <a:r>
-              <a:rPr sz="1800" b="0" i="0">
+              <a:rPr sz="1300" b="1" i="0">
+                <a:solidFill>
+                  <a:srgbClr val="8EDBD4"/>
+                </a:solidFill>
+                <a:latin typeface="Arial"/>
+              </a:rPr>
+              <a:t>Passed means</a:t>
+            </a:r>
+          </a:p>
+        </p:txBody>
+      </p:sp>
+      <p:sp>
+        <p:nvSpPr>
+          <p:cNvPr id="17" name="C4-E39 text 15" descr="sci-ppt:o015"/>
+          <p:cNvSpPr txBox="1"/>
+          <p:nvPr/>
+        </p:nvSpPr>
+        <p:spPr>
+          <a:xfrm>
+            <a:off x="795528" y="3566160"/>
+            <a:ext cx="5010912" cy="231648"/>
+          </a:xfrm>
+          <a:prstGeom prst="rect">
+            <a:avLst/>
+          </a:prstGeom>
+          <a:noFill/>
+          <a:effectLst/>
+        </p:spPr>
+        <p:txBody>
+          <a:bodyPr wrap="none" lIns="18288" rIns="18288" tIns="18288" bIns="18288" anchor="t">
+            <a:spAutoFit/>
+          </a:bodyPr>
+          <a:lstStyle/>
+          <a:p>
+            <a:pPr algn="l">
+              <a:spcAft>
+                <a:spcPts val="0"/>
+              </a:spcAft>
+            </a:pPr>
+            <a:r>
+              <a:rPr sz="1200" b="0" i="0">
                 <a:solidFill>
                   <a:srgbClr val="E7F0F3"/>
                 </a:solidFill>
                 <a:latin typeface="Arial"/>
               </a:rPr>
-              <a:t>Δx</a:t>
-            </a:r>
-          </a:p>
-        </p:txBody>
-      </p:sp>
-      <p:sp>
-        <p:nvSpPr>
-          <p:cNvPr id="9" name="C4-E39 text 7" descr="sci-ppt:o007"/>
+              <a:t>The budgets are large enough: a necessary condition.</a:t>
+            </a:r>
+          </a:p>
+        </p:txBody>
+      </p:sp>
+      <p:sp>
+        <p:nvSpPr>
+          <p:cNvPr id="18" name="C4-E39 ellipse 16" descr="sci-ppt:o016"/>
+          <p:cNvSpPr/>
+          <p:nvPr/>
+        </p:nvSpPr>
+        <p:spPr>
+          <a:xfrm>
+            <a:off x="626364" y="3619499"/>
+            <a:ext cx="82296" cy="82296"/>
+          </a:xfrm>
+          <a:prstGeom prst="ellipse">
+            <a:avLst/>
+          </a:prstGeom>
+          <a:solidFill>
+            <a:srgbClr val="8EDBD4"/>
+          </a:solidFill>
+          <a:ln w="12700">
+            <a:solidFill>
+              <a:srgbClr val="8EDBD4"/>
+            </a:solidFill>
+          </a:ln>
+          <a:effectLst/>
+        </p:spPr>
+        <p:txBody>
+          <a:bodyPr rtlCol="0" anchor="ctr"/>
+          <a:lstStyle/>
+          <a:p>
+            <a:pPr algn="ctr"/>
+          </a:p>
+        </p:txBody>
+      </p:sp>
+      <p:sp>
+        <p:nvSpPr>
+          <p:cNvPr id="19" name="C4-E39 text 17" descr="sci-ppt:o017"/>
           <p:cNvSpPr txBox="1"/>
           <p:nvPr/>
         </p:nvSpPr>
         <p:spPr>
           <a:xfrm>
-            <a:off x="411480" y="2011680"/>
-            <a:ext cx="1463040" cy="365760"/>
+            <a:off x="795528" y="3843528"/>
+            <a:ext cx="5010912" cy="231648"/>
           </a:xfrm>
           <a:prstGeom prst="rect">
             <a:avLst/>
@@ -3326,7 +3722,7 @@
           <a:effectLst/>
         </p:spPr>
         <p:txBody>
-          <a:bodyPr wrap="square" lIns="27432" rIns="27432" tIns="18288" bIns="18288" anchor="ctr">
+          <a:bodyPr wrap="none" lIns="18288" rIns="18288" tIns="18288" bIns="18288" anchor="t">
             <a:spAutoFit/>
           </a:bodyPr>
           <a:lstStyle/>
@@ -3337,27 +3733,59 @@
               </a:spcAft>
             </a:pPr>
             <a:r>
-              <a:rPr sz="1800" b="0" i="0">
+              <a:rPr sz="1200" b="0" i="0">
                 <a:solidFill>
                   <a:srgbClr val="E7F0F3"/>
                 </a:solidFill>
                 <a:latin typeface="Arial"/>
               </a:rPr>
-              <a:t>H_f</a:t>
-            </a:r>
-          </a:p>
-        </p:txBody>
-      </p:sp>
-      <p:sp>
-        <p:nvSpPr>
-          <p:cNvPr id="10" name="C4-E39 text 8" descr="sci-ppt:o008"/>
+              <a:t>No contradiction between energy and momentum.</a:t>
+            </a:r>
+          </a:p>
+        </p:txBody>
+      </p:sp>
+      <p:sp>
+        <p:nvSpPr>
+          <p:cNvPr id="20" name="C4-E39 ellipse 18" descr="sci-ppt:o018"/>
+          <p:cNvSpPr/>
+          <p:nvPr/>
+        </p:nvSpPr>
+        <p:spPr>
+          <a:xfrm>
+            <a:off x="626364" y="3896868"/>
+            <a:ext cx="82296" cy="82296"/>
+          </a:xfrm>
+          <a:prstGeom prst="ellipse">
+            <a:avLst/>
+          </a:prstGeom>
+          <a:solidFill>
+            <a:srgbClr val="8EDBD4"/>
+          </a:solidFill>
+          <a:ln w="12700">
+            <a:solidFill>
+              <a:srgbClr val="8EDBD4"/>
+            </a:solidFill>
+          </a:ln>
+          <a:effectLst/>
+        </p:spPr>
+        <p:txBody>
+          <a:bodyPr rtlCol="0" anchor="ctr"/>
+          <a:lstStyle/>
+          <a:p>
+            <a:pPr algn="ctr"/>
+          </a:p>
+        </p:txBody>
+      </p:sp>
+      <p:sp>
+        <p:nvSpPr>
+          <p:cNvPr id="21" name="C4-E39 text 19" descr="sci-ppt:o019"/>
           <p:cNvSpPr txBox="1"/>
           <p:nvPr/>
         </p:nvSpPr>
         <p:spPr>
           <a:xfrm>
-            <a:off x="2286000" y="1554480"/>
-            <a:ext cx="1828800" cy="274320"/>
+            <a:off x="795528" y="4120895"/>
+            <a:ext cx="5010912" cy="231648"/>
           </a:xfrm>
           <a:prstGeom prst="rect">
             <a:avLst/>
@@ -3366,7 +3794,7 @@
           <a:effectLst/>
         </p:spPr>
         <p:txBody>
-          <a:bodyPr wrap="square" lIns="27432" rIns="27432" tIns="18288" bIns="18288" anchor="ctr">
+          <a:bodyPr wrap="none" lIns="18288" rIns="18288" tIns="18288" bIns="18288" anchor="t">
             <a:spAutoFit/>
           </a:bodyPr>
           <a:lstStyle/>
@@ -3377,27 +3805,91 @@
               </a:spcAft>
             </a:pPr>
             <a:r>
-              <a:rPr sz="1800" b="0" i="0">
+              <a:rPr sz="1200" b="0" i="0">
                 <a:solidFill>
                   <a:srgbClr val="E7F0F3"/>
                 </a:solidFill>
                 <a:latin typeface="Arial"/>
               </a:rPr>
-              <a:t>θ</a:t>
-            </a:r>
-          </a:p>
-        </p:txBody>
-      </p:sp>
-      <p:sp>
-        <p:nvSpPr>
-          <p:cNvPr id="11" name="C4-E39 text 9" descr="sci-ppt:o009"/>
+              <a:t>Placement error is smaller than the feature, if it is.</a:t>
+            </a:r>
+          </a:p>
+        </p:txBody>
+      </p:sp>
+      <p:sp>
+        <p:nvSpPr>
+          <p:cNvPr id="22" name="C4-E39 ellipse 20" descr="sci-ppt:o020"/>
+          <p:cNvSpPr/>
+          <p:nvPr/>
+        </p:nvSpPr>
+        <p:spPr>
+          <a:xfrm>
+            <a:off x="626364" y="4174235"/>
+            <a:ext cx="82296" cy="82296"/>
+          </a:xfrm>
+          <a:prstGeom prst="ellipse">
+            <a:avLst/>
+          </a:prstGeom>
+          <a:solidFill>
+            <a:srgbClr val="8EDBD4"/>
+          </a:solidFill>
+          <a:ln w="12700">
+            <a:solidFill>
+              <a:srgbClr val="8EDBD4"/>
+            </a:solidFill>
+          </a:ln>
+          <a:effectLst/>
+        </p:spPr>
+        <p:txBody>
+          <a:bodyPr rtlCol="0" anchor="ctr"/>
+          <a:lstStyle/>
+          <a:p>
+            <a:pPr algn="ctr"/>
+          </a:p>
+        </p:txBody>
+      </p:sp>
+      <p:sp>
+        <p:nvSpPr>
+          <p:cNvPr id="23" name="C4-E39 round_rect 21" descr="sci-ppt:o021"/>
+          <p:cNvSpPr/>
+          <p:nvPr/>
+        </p:nvSpPr>
+        <p:spPr>
+          <a:xfrm>
+            <a:off x="6217920" y="3108960"/>
+            <a:ext cx="5486400" cy="2377440"/>
+          </a:xfrm>
+          <a:prstGeom prst="roundRect">
+            <a:avLst/>
+          </a:prstGeom>
+          <a:solidFill>
+            <a:srgbClr val="213E4B"/>
+          </a:solidFill>
+          <a:ln w="20320">
+            <a:solidFill>
+              <a:srgbClr val="F28BA0"/>
+            </a:solidFill>
+          </a:ln>
+          <a:effectLst/>
+        </p:spPr>
+        <p:txBody>
+          <a:bodyPr rtlCol="0" anchor="ctr"/>
+          <a:lstStyle/>
+          <a:p>
+            <a:pPr algn="ctr"/>
+          </a:p>
+        </p:txBody>
+      </p:sp>
+      <p:sp>
+        <p:nvSpPr>
+          <p:cNvPr id="24" name="C4-E39 text 22" descr="sci-ppt:o022"/>
           <p:cNvSpPr txBox="1"/>
           <p:nvPr/>
         </p:nvSpPr>
         <p:spPr>
           <a:xfrm>
-            <a:off x="5852160" y="1463040"/>
-            <a:ext cx="5029200" cy="914400"/>
+            <a:off x="6327648" y="3163824"/>
+            <a:ext cx="5266944" cy="247142"/>
           </a:xfrm>
           <a:prstGeom prst="rect">
             <a:avLst/>
@@ -3406,7 +3898,7 @@
           <a:effectLst/>
         </p:spPr>
         <p:txBody>
-          <a:bodyPr wrap="square" lIns="27432" rIns="27432" tIns="18288" bIns="18288" anchor="ctr">
+          <a:bodyPr wrap="none" lIns="18288" rIns="18288" tIns="18288" bIns="18288" anchor="t">
             <a:spAutoFit/>
           </a:bodyPr>
           <a:lstStyle/>
@@ -3417,15 +3909,111 @@
               </a:spcAft>
             </a:pPr>
             <a:r>
-              <a:rPr sz="2000" b="0" i="0">
+              <a:rPr sz="1300" b="1" i="0">
+                <a:solidFill>
+                  <a:srgbClr val="F28BA0"/>
+                </a:solidFill>
+                <a:latin typeface="Arial"/>
+              </a:rPr>
+              <a:t>Still not shown</a:t>
+            </a:r>
+          </a:p>
+        </p:txBody>
+      </p:sp>
+      <p:sp>
+        <p:nvSpPr>
+          <p:cNvPr id="25" name="C4-E39 text 23" descr="sci-ppt:o023"/>
+          <p:cNvSpPr txBox="1"/>
+          <p:nvPr/>
+        </p:nvSpPr>
+        <p:spPr>
+          <a:xfrm>
+            <a:off x="6556248" y="3566160"/>
+            <a:ext cx="5010912" cy="231648"/>
+          </a:xfrm>
+          <a:prstGeom prst="rect">
+            <a:avLst/>
+          </a:prstGeom>
+          <a:noFill/>
+          <a:effectLst/>
+        </p:spPr>
+        <p:txBody>
+          <a:bodyPr wrap="none" lIns="18288" rIns="18288" tIns="18288" bIns="18288" anchor="t">
+            <a:spAutoFit/>
+          </a:bodyPr>
+          <a:lstStyle/>
+          <a:p>
+            <a:pPr algn="l">
+              <a:spcAft>
+                <a:spcPts val="0"/>
+              </a:spcAft>
+            </a:pPr>
+            <a:r>
+              <a:rPr sz="1200" b="0" i="0">
                 <a:solidFill>
                   <a:srgbClr val="E7F0F3"/>
                 </a:solidFill>
                 <a:latin typeface="Arial"/>
               </a:rPr>
-              <a:t>Normal gap H_f</a:t>
-            </a:r>
-          </a:p>
+              <a:t>That the crack front actually advances (needs G ≥ Γ locally).</a:t>
+            </a:r>
+          </a:p>
+        </p:txBody>
+      </p:sp>
+      <p:sp>
+        <p:nvSpPr>
+          <p:cNvPr id="26" name="C4-E39 ellipse 24" descr="sci-ppt:o024"/>
+          <p:cNvSpPr/>
+          <p:nvPr/>
+        </p:nvSpPr>
+        <p:spPr>
+          <a:xfrm>
+            <a:off x="6387084" y="3619499"/>
+            <a:ext cx="82296" cy="82296"/>
+          </a:xfrm>
+          <a:prstGeom prst="ellipse">
+            <a:avLst/>
+          </a:prstGeom>
+          <a:solidFill>
+            <a:srgbClr val="8EDBD4"/>
+          </a:solidFill>
+          <a:ln w="12700">
+            <a:solidFill>
+              <a:srgbClr val="8EDBD4"/>
+            </a:solidFill>
+          </a:ln>
+          <a:effectLst/>
+        </p:spPr>
+        <p:txBody>
+          <a:bodyPr rtlCol="0" anchor="ctr"/>
+          <a:lstStyle/>
+          <a:p>
+            <a:pPr algn="ctr"/>
+          </a:p>
+        </p:txBody>
+      </p:sp>
+      <p:sp>
+        <p:nvSpPr>
+          <p:cNvPr id="27" name="C4-E39 text 25" descr="sci-ppt:o025"/>
+          <p:cNvSpPr txBox="1"/>
+          <p:nvPr/>
+        </p:nvSpPr>
+        <p:spPr>
+          <a:xfrm>
+            <a:off x="6556248" y="3843528"/>
+            <a:ext cx="5010912" cy="231648"/>
+          </a:xfrm>
+          <a:prstGeom prst="rect">
+            <a:avLst/>
+          </a:prstGeom>
+          <a:noFill/>
+          <a:effectLst/>
+        </p:spPr>
+        <p:txBody>
+          <a:bodyPr wrap="none" lIns="18288" rIns="18288" tIns="18288" bIns="18288" anchor="t">
+            <a:spAutoFit/>
+          </a:bodyPr>
+          <a:lstStyle/>
           <a:p>
             <a:pPr algn="l">
               <a:spcAft>
@@ -3433,49 +4021,59 @@
               </a:spcAft>
             </a:pPr>
             <a:r>
-              <a:rPr sz="2000" b="0" i="0">
+              <a:rPr sz="1200" b="0" i="0">
                 <a:solidFill>
                   <a:srgbClr val="E7F0F3"/>
                 </a:solidFill>
                 <a:latin typeface="Arial"/>
               </a:rPr>
-              <a:t>Lateral error Δx = H_f tan θ</a:t>
-            </a:r>
-          </a:p>
-        </p:txBody>
-      </p:sp>
-      <p:cxnSp>
-        <p:nvCxnSpPr>
-          <p:cNvPr id="12" name="C4-E39 line 10" descr="sci-ppt:o010"/>
-          <p:cNvCxnSpPr/>
+              <a:t>That the film stays intact on departure.</a:t>
+            </a:r>
+          </a:p>
+        </p:txBody>
+      </p:sp>
+      <p:sp>
+        <p:nvSpPr>
+          <p:cNvPr id="28" name="C4-E39 ellipse 26" descr="sci-ppt:o026"/>
+          <p:cNvSpPr/>
           <p:nvPr/>
-        </p:nvCxnSpPr>
-        <p:spPr>
-          <a:xfrm>
-            <a:off x="274320" y="3977639"/>
-            <a:ext cx="11612880" cy="0"/>
-          </a:xfrm>
-          <a:prstGeom prst="line">
+        </p:nvSpPr>
+        <p:spPr>
+          <a:xfrm>
+            <a:off x="6387084" y="3896868"/>
+            <a:ext cx="82296" cy="82296"/>
+          </a:xfrm>
+          <a:prstGeom prst="ellipse">
             <a:avLst/>
           </a:prstGeom>
+          <a:solidFill>
+            <a:srgbClr val="8EDBD4"/>
+          </a:solidFill>
           <a:ln w="12700">
             <a:solidFill>
-              <a:srgbClr val="405967"/>
+              <a:srgbClr val="8EDBD4"/>
             </a:solidFill>
           </a:ln>
           <a:effectLst/>
         </p:spPr>
-      </p:cxnSp>
-      <p:sp>
-        <p:nvSpPr>
-          <p:cNvPr id="13" name="C4-E39 text 11" descr="sci-ppt:o011"/>
+        <p:txBody>
+          <a:bodyPr rtlCol="0" anchor="ctr"/>
+          <a:lstStyle/>
+          <a:p>
+            <a:pPr algn="ctr"/>
+          </a:p>
+        </p:txBody>
+      </p:sp>
+      <p:sp>
+        <p:nvSpPr>
+          <p:cNvPr id="29" name="C4-E39 text 27" descr="sci-ppt:o027"/>
           <p:cNvSpPr txBox="1"/>
           <p:nvPr/>
         </p:nvSpPr>
         <p:spPr>
           <a:xfrm>
-            <a:off x="320040" y="4096512"/>
-            <a:ext cx="5715000" cy="246888"/>
+            <a:off x="6556248" y="4120895"/>
+            <a:ext cx="5010912" cy="231648"/>
           </a:xfrm>
           <a:prstGeom prst="rect">
             <a:avLst/>
@@ -3484,7 +4082,7 @@
           <a:effectLst/>
         </p:spPr>
         <p:txBody>
-          <a:bodyPr wrap="square" lIns="27432" rIns="27432" tIns="18288" bIns="18288" anchor="ctr">
+          <a:bodyPr wrap="none" lIns="18288" rIns="18288" tIns="18288" bIns="18288" anchor="t">
             <a:spAutoFit/>
           </a:bodyPr>
           <a:lstStyle/>
@@ -3495,27 +4093,59 @@
               </a:spcAft>
             </a:pPr>
             <a:r>
-              <a:rPr sz="1150" b="0" i="0">
+              <a:rPr sz="1200" b="0" i="0">
                 <a:solidFill>
-                  <a:srgbClr val="B4C7D2"/>
+                  <a:srgbClr val="E7F0F3"/>
                 </a:solidFill>
                 <a:latin typeface="Arial"/>
               </a:rPr>
-              <a:t>• ΓA_f — intended release</a:t>
-            </a:r>
-          </a:p>
-        </p:txBody>
-      </p:sp>
-      <p:sp>
-        <p:nvSpPr>
-          <p:cNvPr id="14" name="C4-E39 text 12" descr="sci-ppt:o012"/>
+              <a:t>That the real coupling fractions are 0.20 and 0.50.</a:t>
+            </a:r>
+          </a:p>
+        </p:txBody>
+      </p:sp>
+      <p:sp>
+        <p:nvSpPr>
+          <p:cNvPr id="30" name="C4-E39 ellipse 28" descr="sci-ppt:o028"/>
+          <p:cNvSpPr/>
+          <p:nvPr/>
+        </p:nvSpPr>
+        <p:spPr>
+          <a:xfrm>
+            <a:off x="6387084" y="4174235"/>
+            <a:ext cx="82296" cy="82296"/>
+          </a:xfrm>
+          <a:prstGeom prst="ellipse">
+            <a:avLst/>
+          </a:prstGeom>
+          <a:solidFill>
+            <a:srgbClr val="8EDBD4"/>
+          </a:solidFill>
+          <a:ln w="12700">
+            <a:solidFill>
+              <a:srgbClr val="8EDBD4"/>
+            </a:solidFill>
+          </a:ln>
+          <a:effectLst/>
+        </p:spPr>
+        <p:txBody>
+          <a:bodyPr rtlCol="0" anchor="ctr"/>
+          <a:lstStyle/>
+          <a:p>
+            <a:pPr algn="ctr"/>
+          </a:p>
+        </p:txBody>
+      </p:sp>
+      <p:sp>
+        <p:nvSpPr>
+          <p:cNvPr id="31" name="C4-E39 text 29" descr="sci-ppt:o029"/>
           <p:cNvSpPr txBox="1"/>
           <p:nvPr/>
         </p:nvSpPr>
         <p:spPr>
           <a:xfrm>
-            <a:off x="6217920" y="4096512"/>
-            <a:ext cx="5715000" cy="246888"/>
+            <a:off x="320040" y="6510528"/>
+            <a:ext cx="11521440" cy="200660"/>
           </a:xfrm>
           <a:prstGeom prst="rect">
             <a:avLst/>
@@ -3524,167 +4154,7 @@
           <a:effectLst/>
         </p:spPr>
         <p:txBody>
-          <a:bodyPr wrap="square" lIns="27432" rIns="27432" tIns="18288" bIns="18288" anchor="ctr">
-            <a:spAutoFit/>
-          </a:bodyPr>
-          <a:lstStyle/>
-          <a:p>
-            <a:pPr algn="l">
-              <a:spcAft>
-                <a:spcPts val="0"/>
-              </a:spcAft>
-            </a:pPr>
-            <a:r>
-              <a:rPr sz="1150" b="0" i="0">
-                <a:solidFill>
-                  <a:srgbClr val="B4C7D2"/>
-                </a:solidFill>
-                <a:latin typeface="Arial"/>
-              </a:rPr>
-              <a:t>• m_f, v_f — outgoing intact object</a:t>
-            </a:r>
-          </a:p>
-        </p:txBody>
-      </p:sp>
-      <p:sp>
-        <p:nvSpPr>
-          <p:cNvPr id="15" name="C4-E39 text 13" descr="sci-ppt:o013"/>
-          <p:cNvSpPr txBox="1"/>
-          <p:nvPr/>
-        </p:nvSpPr>
-        <p:spPr>
-          <a:xfrm>
-            <a:off x="320040" y="4329684"/>
-            <a:ext cx="5715000" cy="246888"/>
-          </a:xfrm>
-          <a:prstGeom prst="rect">
-            <a:avLst/>
-          </a:prstGeom>
-          <a:noFill/>
-          <a:effectLst/>
-        </p:spPr>
-        <p:txBody>
-          <a:bodyPr wrap="square" lIns="27432" rIns="27432" tIns="18288" bIns="18288" anchor="ctr">
-            <a:spAutoFit/>
-          </a:bodyPr>
-          <a:lstStyle/>
-          <a:p>
-            <a:pPr algn="l">
-              <a:spcAft>
-                <a:spcPts val="0"/>
-              </a:spcAft>
-            </a:pPr>
-            <a:r>
-              <a:rPr sz="1150" b="0" i="0">
-                <a:solidFill>
-                  <a:srgbClr val="B4C7D2"/>
-                </a:solidFill>
-                <a:latin typeface="Arial"/>
-              </a:rPr>
-              <a:t>• E_solid, I_net — transmitted budgets</a:t>
-            </a:r>
-          </a:p>
-        </p:txBody>
-      </p:sp>
-      <p:sp>
-        <p:nvSpPr>
-          <p:cNvPr id="16" name="C4-E39 text 14" descr="sci-ppt:o014"/>
-          <p:cNvSpPr txBox="1"/>
-          <p:nvPr/>
-        </p:nvSpPr>
-        <p:spPr>
-          <a:xfrm>
-            <a:off x="6217920" y="4329684"/>
-            <a:ext cx="5715000" cy="246888"/>
-          </a:xfrm>
-          <a:prstGeom prst="rect">
-            <a:avLst/>
-          </a:prstGeom>
-          <a:noFill/>
-          <a:effectLst/>
-        </p:spPr>
-        <p:txBody>
-          <a:bodyPr wrap="square" lIns="27432" rIns="27432" tIns="18288" bIns="18288" anchor="ctr">
-            <a:spAutoFit/>
-          </a:bodyPr>
-          <a:lstStyle/>
-          <a:p>
-            <a:pPr algn="l">
-              <a:spcAft>
-                <a:spcPts val="0"/>
-              </a:spcAft>
-            </a:pPr>
-            <a:r>
-              <a:rPr sz="1150" b="0" i="0">
-                <a:solidFill>
-                  <a:srgbClr val="B4C7D2"/>
-                </a:solidFill>
-                <a:latin typeface="Arial"/>
-              </a:rPr>
-              <a:t>• H_f, θ → Δx at receiver</a:t>
-            </a:r>
-          </a:p>
-        </p:txBody>
-      </p:sp>
-      <p:sp>
-        <p:nvSpPr>
-          <p:cNvPr id="17" name="C4-E39 text 15" descr="sci-ppt:o015"/>
-          <p:cNvSpPr txBox="1"/>
-          <p:nvPr/>
-        </p:nvSpPr>
-        <p:spPr>
-          <a:xfrm>
-            <a:off x="320040" y="5596128"/>
-            <a:ext cx="11430000" cy="292608"/>
-          </a:xfrm>
-          <a:prstGeom prst="rect">
-            <a:avLst/>
-          </a:prstGeom>
-          <a:noFill/>
-          <a:effectLst/>
-        </p:spPr>
-        <p:txBody>
-          <a:bodyPr wrap="square" lIns="27432" rIns="27432" tIns="18288" bIns="18288" anchor="ctr">
-            <a:spAutoFit/>
-          </a:bodyPr>
-          <a:lstStyle/>
-          <a:p>
-            <a:pPr algn="l">
-              <a:spcAft>
-                <a:spcPts val="0"/>
-              </a:spcAft>
-            </a:pPr>
-            <a:r>
-              <a:rPr sz="1150" b="0" i="0">
-                <a:solidFill>
-                  <a:srgbClr val="8EDBD4"/>
-                </a:solidFill>
-                <a:latin typeface="Arial"/>
-              </a:rPr>
-              <a:t>Full release, intact flight and repeatable reset are separate requirements.</a:t>
-            </a:r>
-          </a:p>
-        </p:txBody>
-      </p:sp>
-      <p:sp>
-        <p:nvSpPr>
-          <p:cNvPr id="18" name="C4-E39 text 16" descr="sci-ppt:o016"/>
-          <p:cNvSpPr txBox="1"/>
-          <p:nvPr/>
-        </p:nvSpPr>
-        <p:spPr>
-          <a:xfrm>
-            <a:off x="320040" y="6473952"/>
-            <a:ext cx="11430000" cy="256032"/>
-          </a:xfrm>
-          <a:prstGeom prst="rect">
-            <a:avLst/>
-          </a:prstGeom>
-          <a:noFill/>
-          <a:effectLst/>
-        </p:spPr>
-        <p:txBody>
-          <a:bodyPr wrap="square" lIns="27432" rIns="27432" tIns="18288" bIns="18288" anchor="ctr">
+          <a:bodyPr wrap="none" lIns="18288" rIns="18288" tIns="18288" bIns="18288" anchor="t">
             <a:spAutoFit/>
           </a:bodyPr>
           <a:lstStyle/>
@@ -3701,7 +4171,7 @@
                 </a:solidFill>
                 <a:latin typeface="Arial"/>
               </a:rPr>
-              <a:t>Model schematic; geometry is not to scale.</a:t>
+              <a:t>Reference formulas of the Defence 3 answer: Eqs. C4-E30 and C4-E34.</a:t>
             </a:r>
           </a:p>
         </p:txBody>
